--- a/LinkUp_Presentation.pptx
+++ b/LinkUp_Presentation.pptx
@@ -5,14 +5,14 @@
     <p:sldMasterId id="2147483648" r:id="rId1"/>
   </p:sldMasterIdLst>
   <p:sldIdLst>
-    <p:sldId id="256" r:id="rId7"/>
-    <p:sldId id="257" r:id="rId8"/>
-    <p:sldId id="258" r:id="rId9"/>
-    <p:sldId id="259" r:id="rId10"/>
-    <p:sldId id="260" r:id="rId11"/>
-    <p:sldId id="261" r:id="rId12"/>
+    <p:sldId id="256" r:id="rId2"/>
+    <p:sldId id="257" r:id="rId3"/>
+    <p:sldId id="258" r:id="rId4"/>
+    <p:sldId id="259" r:id="rId5"/>
+    <p:sldId id="260" r:id="rId6"/>
+    <p:sldId id="261" r:id="rId7"/>
   </p:sldIdLst>
-  <p:sldSz cx="12191695" cy="6858000" type="screen4x3"/>
+  <p:sldSz cx="12192000" cy="6858000"/>
   <p:notesSz cx="6858000" cy="9144000"/>
   <p:defaultTextStyle>
     <a:defPPr>
@@ -109,6 +109,22 @@
       </a:defRPr>
     </a:lvl9pPr>
   </p:defaultTextStyle>
+  <p:extLst>
+    <p:ext uri="{EFAFB233-063F-42B5-8137-9DF3F51BA10A}">
+      <p15:sldGuideLst xmlns:p15="http://schemas.microsoft.com/office/powerpoint/2012/main">
+        <p15:guide id="1" orient="horz" pos="2160">
+          <p15:clr>
+            <a:srgbClr val="A4A3A4"/>
+          </p15:clr>
+        </p15:guide>
+        <p15:guide id="2" pos="2880">
+          <p15:clr>
+            <a:srgbClr val="A4A3A4"/>
+          </p15:clr>
+        </p15:guide>
+      </p15:sldGuideLst>
+    </p:ext>
+  </p:extLst>
 </p:presentation>
 </file>
 
@@ -150,10 +166,9 @@
           <a:lstStyle/>
           <a:p>
             <a:r>
-              <a:rPr lang="en-US" smtClean="0"/>
+              <a:rPr lang="en-US"/>
               <a:t>Click to edit Master title style</a:t>
             </a:r>
-            <a:endParaRPr lang="en-US"/>
           </a:p>
         </p:txBody>
       </p:sp>
@@ -269,10 +284,9 @@
           </a:lstStyle>
           <a:p>
             <a:r>
-              <a:rPr lang="en-US" smtClean="0"/>
+              <a:rPr lang="en-US"/>
               <a:t>Click to edit Master subtitle style</a:t>
             </a:r>
-            <a:endParaRPr lang="en-US"/>
           </a:p>
         </p:txBody>
       </p:sp>
@@ -293,7 +307,7 @@
           <a:p>
             <a:fld id="{5BCAD085-E8A6-8845-BD4E-CB4CCA059FC4}" type="datetimeFigureOut">
               <a:rPr lang="en-US" smtClean="0"/>
-              <a:t>1/27/13</a:t>
+              <a:t>10/9/2026</a:t>
             </a:fld>
             <a:endParaRPr lang="en-US"/>
           </a:p>
@@ -387,10 +401,9 @@
           <a:lstStyle/>
           <a:p>
             <a:r>
-              <a:rPr lang="en-US" smtClean="0"/>
+              <a:rPr lang="en-US"/>
               <a:t>Click to edit Master title style</a:t>
             </a:r>
-            <a:endParaRPr lang="en-US"/>
           </a:p>
         </p:txBody>
       </p:sp>
@@ -411,38 +424,37 @@
           <a:p>
             <a:pPr lvl="0"/>
             <a:r>
-              <a:rPr lang="en-US" smtClean="0"/>
+              <a:rPr lang="en-US"/>
               <a:t>Click to edit Master text styles</a:t>
             </a:r>
           </a:p>
           <a:p>
             <a:pPr lvl="1"/>
             <a:r>
-              <a:rPr lang="en-US" smtClean="0"/>
+              <a:rPr lang="en-US"/>
               <a:t>Second level</a:t>
             </a:r>
           </a:p>
           <a:p>
             <a:pPr lvl="2"/>
             <a:r>
-              <a:rPr lang="en-US" smtClean="0"/>
+              <a:rPr lang="en-US"/>
               <a:t>Third level</a:t>
             </a:r>
           </a:p>
           <a:p>
             <a:pPr lvl="3"/>
             <a:r>
-              <a:rPr lang="en-US" smtClean="0"/>
+              <a:rPr lang="en-US"/>
               <a:t>Fourth level</a:t>
             </a:r>
           </a:p>
           <a:p>
             <a:pPr lvl="4"/>
             <a:r>
-              <a:rPr lang="en-US" smtClean="0"/>
+              <a:rPr lang="en-US"/>
               <a:t>Fifth level</a:t>
             </a:r>
-            <a:endParaRPr lang="en-US"/>
           </a:p>
         </p:txBody>
       </p:sp>
@@ -463,7 +475,7 @@
           <a:p>
             <a:fld id="{5BCAD085-E8A6-8845-BD4E-CB4CCA059FC4}" type="datetimeFigureOut">
               <a:rPr lang="en-US" smtClean="0"/>
-              <a:t>1/27/13</a:t>
+              <a:t>10/9/2026</a:t>
             </a:fld>
             <a:endParaRPr lang="en-US"/>
           </a:p>
@@ -562,10 +574,9 @@
           <a:lstStyle/>
           <a:p>
             <a:r>
-              <a:rPr lang="en-US" smtClean="0"/>
+              <a:rPr lang="en-US"/>
               <a:t>Click to edit Master title style</a:t>
             </a:r>
-            <a:endParaRPr lang="en-US"/>
           </a:p>
         </p:txBody>
       </p:sp>
@@ -591,38 +602,37 @@
           <a:p>
             <a:pPr lvl="0"/>
             <a:r>
-              <a:rPr lang="en-US" smtClean="0"/>
+              <a:rPr lang="en-US"/>
               <a:t>Click to edit Master text styles</a:t>
             </a:r>
           </a:p>
           <a:p>
             <a:pPr lvl="1"/>
             <a:r>
-              <a:rPr lang="en-US" smtClean="0"/>
+              <a:rPr lang="en-US"/>
               <a:t>Second level</a:t>
             </a:r>
           </a:p>
           <a:p>
             <a:pPr lvl="2"/>
             <a:r>
-              <a:rPr lang="en-US" smtClean="0"/>
+              <a:rPr lang="en-US"/>
               <a:t>Third level</a:t>
             </a:r>
           </a:p>
           <a:p>
             <a:pPr lvl="3"/>
             <a:r>
-              <a:rPr lang="en-US" smtClean="0"/>
+              <a:rPr lang="en-US"/>
               <a:t>Fourth level</a:t>
             </a:r>
           </a:p>
           <a:p>
             <a:pPr lvl="4"/>
             <a:r>
-              <a:rPr lang="en-US" smtClean="0"/>
+              <a:rPr lang="en-US"/>
               <a:t>Fifth level</a:t>
             </a:r>
-            <a:endParaRPr lang="en-US"/>
           </a:p>
         </p:txBody>
       </p:sp>
@@ -643,7 +653,7 @@
           <a:p>
             <a:fld id="{5BCAD085-E8A6-8845-BD4E-CB4CCA059FC4}" type="datetimeFigureOut">
               <a:rPr lang="en-US" smtClean="0"/>
-              <a:t>1/27/13</a:t>
+              <a:t>10/9/2026</a:t>
             </a:fld>
             <a:endParaRPr lang="en-US"/>
           </a:p>
@@ -737,10 +747,9 @@
           <a:lstStyle/>
           <a:p>
             <a:r>
-              <a:rPr lang="en-US" smtClean="0"/>
+              <a:rPr lang="en-US"/>
               <a:t>Click to edit Master title style</a:t>
             </a:r>
-            <a:endParaRPr lang="en-US"/>
           </a:p>
         </p:txBody>
       </p:sp>
@@ -761,38 +770,37 @@
           <a:p>
             <a:pPr lvl="0"/>
             <a:r>
-              <a:rPr lang="en-US" smtClean="0"/>
+              <a:rPr lang="en-US"/>
               <a:t>Click to edit Master text styles</a:t>
             </a:r>
           </a:p>
           <a:p>
             <a:pPr lvl="1"/>
             <a:r>
-              <a:rPr lang="en-US" smtClean="0"/>
+              <a:rPr lang="en-US"/>
               <a:t>Second level</a:t>
             </a:r>
           </a:p>
           <a:p>
             <a:pPr lvl="2"/>
             <a:r>
-              <a:rPr lang="en-US" smtClean="0"/>
+              <a:rPr lang="en-US"/>
               <a:t>Third level</a:t>
             </a:r>
           </a:p>
           <a:p>
             <a:pPr lvl="3"/>
             <a:r>
-              <a:rPr lang="en-US" smtClean="0"/>
+              <a:rPr lang="en-US"/>
               <a:t>Fourth level</a:t>
             </a:r>
           </a:p>
           <a:p>
             <a:pPr lvl="4"/>
             <a:r>
-              <a:rPr lang="en-US" smtClean="0"/>
+              <a:rPr lang="en-US"/>
               <a:t>Fifth level</a:t>
             </a:r>
-            <a:endParaRPr lang="en-US"/>
           </a:p>
         </p:txBody>
       </p:sp>
@@ -813,7 +821,7 @@
           <a:p>
             <a:fld id="{5BCAD085-E8A6-8845-BD4E-CB4CCA059FC4}" type="datetimeFigureOut">
               <a:rPr lang="en-US" smtClean="0"/>
-              <a:t>1/27/13</a:t>
+              <a:t>10/9/2026</a:t>
             </a:fld>
             <a:endParaRPr lang="en-US"/>
           </a:p>
@@ -916,10 +924,9 @@
           </a:lstStyle>
           <a:p>
             <a:r>
-              <a:rPr lang="en-US" smtClean="0"/>
+              <a:rPr lang="en-US"/>
               <a:t>Click to edit Master title style</a:t>
             </a:r>
-            <a:endParaRPr lang="en-US"/>
           </a:p>
         </p:txBody>
       </p:sp>
@@ -1036,7 +1043,7 @@
           <a:p>
             <a:pPr lvl="0"/>
             <a:r>
-              <a:rPr lang="en-US" smtClean="0"/>
+              <a:rPr lang="en-US"/>
               <a:t>Click to edit Master text styles</a:t>
             </a:r>
           </a:p>
@@ -1059,7 +1066,7 @@
           <a:p>
             <a:fld id="{5BCAD085-E8A6-8845-BD4E-CB4CCA059FC4}" type="datetimeFigureOut">
               <a:rPr lang="en-US" smtClean="0"/>
-              <a:t>1/27/13</a:t>
+              <a:t>10/9/2026</a:t>
             </a:fld>
             <a:endParaRPr lang="en-US"/>
           </a:p>
@@ -1153,10 +1160,9 @@
           <a:lstStyle/>
           <a:p>
             <a:r>
-              <a:rPr lang="en-US" smtClean="0"/>
+              <a:rPr lang="en-US"/>
               <a:t>Click to edit Master title style</a:t>
             </a:r>
-            <a:endParaRPr lang="en-US"/>
           </a:p>
         </p:txBody>
       </p:sp>
@@ -1210,38 +1216,37 @@
           <a:p>
             <a:pPr lvl="0"/>
             <a:r>
-              <a:rPr lang="en-US" smtClean="0"/>
+              <a:rPr lang="en-US"/>
               <a:t>Click to edit Master text styles</a:t>
             </a:r>
           </a:p>
           <a:p>
             <a:pPr lvl="1"/>
             <a:r>
-              <a:rPr lang="en-US" smtClean="0"/>
+              <a:rPr lang="en-US"/>
               <a:t>Second level</a:t>
             </a:r>
           </a:p>
           <a:p>
             <a:pPr lvl="2"/>
             <a:r>
-              <a:rPr lang="en-US" smtClean="0"/>
+              <a:rPr lang="en-US"/>
               <a:t>Third level</a:t>
             </a:r>
           </a:p>
           <a:p>
             <a:pPr lvl="3"/>
             <a:r>
-              <a:rPr lang="en-US" smtClean="0"/>
+              <a:rPr lang="en-US"/>
               <a:t>Fourth level</a:t>
             </a:r>
           </a:p>
           <a:p>
             <a:pPr lvl="4"/>
             <a:r>
-              <a:rPr lang="en-US" smtClean="0"/>
+              <a:rPr lang="en-US"/>
               <a:t>Fifth level</a:t>
             </a:r>
-            <a:endParaRPr lang="en-US"/>
           </a:p>
         </p:txBody>
       </p:sp>
@@ -1295,38 +1300,37 @@
           <a:p>
             <a:pPr lvl="0"/>
             <a:r>
-              <a:rPr lang="en-US" smtClean="0"/>
+              <a:rPr lang="en-US"/>
               <a:t>Click to edit Master text styles</a:t>
             </a:r>
           </a:p>
           <a:p>
             <a:pPr lvl="1"/>
             <a:r>
-              <a:rPr lang="en-US" smtClean="0"/>
+              <a:rPr lang="en-US"/>
               <a:t>Second level</a:t>
             </a:r>
           </a:p>
           <a:p>
             <a:pPr lvl="2"/>
             <a:r>
-              <a:rPr lang="en-US" smtClean="0"/>
+              <a:rPr lang="en-US"/>
               <a:t>Third level</a:t>
             </a:r>
           </a:p>
           <a:p>
             <a:pPr lvl="3"/>
             <a:r>
-              <a:rPr lang="en-US" smtClean="0"/>
+              <a:rPr lang="en-US"/>
               <a:t>Fourth level</a:t>
             </a:r>
           </a:p>
           <a:p>
             <a:pPr lvl="4"/>
             <a:r>
-              <a:rPr lang="en-US" smtClean="0"/>
+              <a:rPr lang="en-US"/>
               <a:t>Fifth level</a:t>
             </a:r>
-            <a:endParaRPr lang="en-US"/>
           </a:p>
         </p:txBody>
       </p:sp>
@@ -1347,7 +1351,7 @@
           <a:p>
             <a:fld id="{5BCAD085-E8A6-8845-BD4E-CB4CCA059FC4}" type="datetimeFigureOut">
               <a:rPr lang="en-US" smtClean="0"/>
-              <a:t>1/27/13</a:t>
+              <a:t>10/9/2026</a:t>
             </a:fld>
             <a:endParaRPr lang="en-US"/>
           </a:p>
@@ -1445,10 +1449,9 @@
           </a:lstStyle>
           <a:p>
             <a:r>
-              <a:rPr lang="en-US" smtClean="0"/>
+              <a:rPr lang="en-US"/>
               <a:t>Click to edit Master title style</a:t>
             </a:r>
-            <a:endParaRPr lang="en-US"/>
           </a:p>
         </p:txBody>
       </p:sp>
@@ -1511,7 +1514,7 @@
           <a:p>
             <a:pPr lvl="0"/>
             <a:r>
-              <a:rPr lang="en-US" smtClean="0"/>
+              <a:rPr lang="en-US"/>
               <a:t>Click to edit Master text styles</a:t>
             </a:r>
           </a:p>
@@ -1567,38 +1570,37 @@
           <a:p>
             <a:pPr lvl="0"/>
             <a:r>
-              <a:rPr lang="en-US" smtClean="0"/>
+              <a:rPr lang="en-US"/>
               <a:t>Click to edit Master text styles</a:t>
             </a:r>
           </a:p>
           <a:p>
             <a:pPr lvl="1"/>
             <a:r>
-              <a:rPr lang="en-US" smtClean="0"/>
+              <a:rPr lang="en-US"/>
               <a:t>Second level</a:t>
             </a:r>
           </a:p>
           <a:p>
             <a:pPr lvl="2"/>
             <a:r>
-              <a:rPr lang="en-US" smtClean="0"/>
+              <a:rPr lang="en-US"/>
               <a:t>Third level</a:t>
             </a:r>
           </a:p>
           <a:p>
             <a:pPr lvl="3"/>
             <a:r>
-              <a:rPr lang="en-US" smtClean="0"/>
+              <a:rPr lang="en-US"/>
               <a:t>Fourth level</a:t>
             </a:r>
           </a:p>
           <a:p>
             <a:pPr lvl="4"/>
             <a:r>
-              <a:rPr lang="en-US" smtClean="0"/>
+              <a:rPr lang="en-US"/>
               <a:t>Fifth level</a:t>
             </a:r>
-            <a:endParaRPr lang="en-US"/>
           </a:p>
         </p:txBody>
       </p:sp>
@@ -1661,7 +1663,7 @@
           <a:p>
             <a:pPr lvl="0"/>
             <a:r>
-              <a:rPr lang="en-US" smtClean="0"/>
+              <a:rPr lang="en-US"/>
               <a:t>Click to edit Master text styles</a:t>
             </a:r>
           </a:p>
@@ -1717,38 +1719,37 @@
           <a:p>
             <a:pPr lvl="0"/>
             <a:r>
-              <a:rPr lang="en-US" smtClean="0"/>
+              <a:rPr lang="en-US"/>
               <a:t>Click to edit Master text styles</a:t>
             </a:r>
           </a:p>
           <a:p>
             <a:pPr lvl="1"/>
             <a:r>
-              <a:rPr lang="en-US" smtClean="0"/>
+              <a:rPr lang="en-US"/>
               <a:t>Second level</a:t>
             </a:r>
           </a:p>
           <a:p>
             <a:pPr lvl="2"/>
             <a:r>
-              <a:rPr lang="en-US" smtClean="0"/>
+              <a:rPr lang="en-US"/>
               <a:t>Third level</a:t>
             </a:r>
           </a:p>
           <a:p>
             <a:pPr lvl="3"/>
             <a:r>
-              <a:rPr lang="en-US" smtClean="0"/>
+              <a:rPr lang="en-US"/>
               <a:t>Fourth level</a:t>
             </a:r>
           </a:p>
           <a:p>
             <a:pPr lvl="4"/>
             <a:r>
-              <a:rPr lang="en-US" smtClean="0"/>
+              <a:rPr lang="en-US"/>
               <a:t>Fifth level</a:t>
             </a:r>
-            <a:endParaRPr lang="en-US"/>
           </a:p>
         </p:txBody>
       </p:sp>
@@ -1769,7 +1770,7 @@
           <a:p>
             <a:fld id="{5BCAD085-E8A6-8845-BD4E-CB4CCA059FC4}" type="datetimeFigureOut">
               <a:rPr lang="en-US" smtClean="0"/>
-              <a:t>1/27/13</a:t>
+              <a:t>10/9/2026</a:t>
             </a:fld>
             <a:endParaRPr lang="en-US"/>
           </a:p>
@@ -1863,10 +1864,9 @@
           <a:lstStyle/>
           <a:p>
             <a:r>
-              <a:rPr lang="en-US" smtClean="0"/>
+              <a:rPr lang="en-US"/>
               <a:t>Click to edit Master title style</a:t>
             </a:r>
-            <a:endParaRPr lang="en-US"/>
           </a:p>
         </p:txBody>
       </p:sp>
@@ -1887,7 +1887,7 @@
           <a:p>
             <a:fld id="{5BCAD085-E8A6-8845-BD4E-CB4CCA059FC4}" type="datetimeFigureOut">
               <a:rPr lang="en-US" smtClean="0"/>
-              <a:t>1/27/13</a:t>
+              <a:t>10/9/2026</a:t>
             </a:fld>
             <a:endParaRPr lang="en-US"/>
           </a:p>
@@ -1982,7 +1982,7 @@
           <a:p>
             <a:fld id="{5BCAD085-E8A6-8845-BD4E-CB4CCA059FC4}" type="datetimeFigureOut">
               <a:rPr lang="en-US" smtClean="0"/>
-              <a:t>1/27/13</a:t>
+              <a:t>10/9/2026</a:t>
             </a:fld>
             <a:endParaRPr lang="en-US"/>
           </a:p>
@@ -2085,10 +2085,9 @@
           </a:lstStyle>
           <a:p>
             <a:r>
-              <a:rPr lang="en-US" smtClean="0"/>
+              <a:rPr lang="en-US"/>
               <a:t>Click to edit Master title style</a:t>
             </a:r>
-            <a:endParaRPr lang="en-US"/>
           </a:p>
         </p:txBody>
       </p:sp>
@@ -2142,38 +2141,37 @@
           <a:p>
             <a:pPr lvl="0"/>
             <a:r>
-              <a:rPr lang="en-US" smtClean="0"/>
+              <a:rPr lang="en-US"/>
               <a:t>Click to edit Master text styles</a:t>
             </a:r>
           </a:p>
           <a:p>
             <a:pPr lvl="1"/>
             <a:r>
-              <a:rPr lang="en-US" smtClean="0"/>
+              <a:rPr lang="en-US"/>
               <a:t>Second level</a:t>
             </a:r>
           </a:p>
           <a:p>
             <a:pPr lvl="2"/>
             <a:r>
-              <a:rPr lang="en-US" smtClean="0"/>
+              <a:rPr lang="en-US"/>
               <a:t>Third level</a:t>
             </a:r>
           </a:p>
           <a:p>
             <a:pPr lvl="3"/>
             <a:r>
-              <a:rPr lang="en-US" smtClean="0"/>
+              <a:rPr lang="en-US"/>
               <a:t>Fourth level</a:t>
             </a:r>
           </a:p>
           <a:p>
             <a:pPr lvl="4"/>
             <a:r>
-              <a:rPr lang="en-US" smtClean="0"/>
+              <a:rPr lang="en-US"/>
               <a:t>Fifth level</a:t>
             </a:r>
-            <a:endParaRPr lang="en-US"/>
           </a:p>
         </p:txBody>
       </p:sp>
@@ -2236,7 +2234,7 @@
           <a:p>
             <a:pPr lvl="0"/>
             <a:r>
-              <a:rPr lang="en-US" smtClean="0"/>
+              <a:rPr lang="en-US"/>
               <a:t>Click to edit Master text styles</a:t>
             </a:r>
           </a:p>
@@ -2259,7 +2257,7 @@
           <a:p>
             <a:fld id="{5BCAD085-E8A6-8845-BD4E-CB4CCA059FC4}" type="datetimeFigureOut">
               <a:rPr lang="en-US" smtClean="0"/>
-              <a:t>1/27/13</a:t>
+              <a:t>10/9/2026</a:t>
             </a:fld>
             <a:endParaRPr lang="en-US"/>
           </a:p>
@@ -2362,10 +2360,9 @@
           </a:lstStyle>
           <a:p>
             <a:r>
-              <a:rPr lang="en-US" smtClean="0"/>
+              <a:rPr lang="en-US"/>
               <a:t>Click to edit Master title style</a:t>
             </a:r>
-            <a:endParaRPr lang="en-US"/>
           </a:p>
         </p:txBody>
       </p:sp>
@@ -2489,7 +2486,7 @@
           <a:p>
             <a:pPr lvl="0"/>
             <a:r>
-              <a:rPr lang="en-US" smtClean="0"/>
+              <a:rPr lang="en-US"/>
               <a:t>Click to edit Master text styles</a:t>
             </a:r>
           </a:p>
@@ -2512,7 +2509,7 @@
           <a:p>
             <a:fld id="{5BCAD085-E8A6-8845-BD4E-CB4CCA059FC4}" type="datetimeFigureOut">
               <a:rPr lang="en-US" smtClean="0"/>
-              <a:t>1/27/13</a:t>
+              <a:t>10/9/2026</a:t>
             </a:fld>
             <a:endParaRPr lang="en-US"/>
           </a:p>
@@ -2621,10 +2618,9 @@
           <a:lstStyle/>
           <a:p>
             <a:r>
-              <a:rPr lang="en-US" smtClean="0"/>
+              <a:rPr lang="en-US"/>
               <a:t>Click to edit Master title style</a:t>
             </a:r>
-            <a:endParaRPr lang="en-US"/>
           </a:p>
         </p:txBody>
       </p:sp>
@@ -2655,38 +2651,37 @@
           <a:p>
             <a:pPr lvl="0"/>
             <a:r>
-              <a:rPr lang="en-US" smtClean="0"/>
+              <a:rPr lang="en-US"/>
               <a:t>Click to edit Master text styles</a:t>
             </a:r>
           </a:p>
           <a:p>
             <a:pPr lvl="1"/>
             <a:r>
-              <a:rPr lang="en-US" smtClean="0"/>
+              <a:rPr lang="en-US"/>
               <a:t>Second level</a:t>
             </a:r>
           </a:p>
           <a:p>
             <a:pPr lvl="2"/>
             <a:r>
-              <a:rPr lang="en-US" smtClean="0"/>
+              <a:rPr lang="en-US"/>
               <a:t>Third level</a:t>
             </a:r>
           </a:p>
           <a:p>
             <a:pPr lvl="3"/>
             <a:r>
-              <a:rPr lang="en-US" smtClean="0"/>
+              <a:rPr lang="en-US"/>
               <a:t>Fourth level</a:t>
             </a:r>
           </a:p>
           <a:p>
             <a:pPr lvl="4"/>
             <a:r>
-              <a:rPr lang="en-US" smtClean="0"/>
+              <a:rPr lang="en-US"/>
               <a:t>Fifth level</a:t>
             </a:r>
-            <a:endParaRPr lang="en-US"/>
           </a:p>
         </p:txBody>
       </p:sp>
@@ -2725,7 +2720,7 @@
           <a:p>
             <a:fld id="{5BCAD085-E8A6-8845-BD4E-CB4CCA059FC4}" type="datetimeFigureOut">
               <a:rPr lang="en-US" smtClean="0"/>
-              <a:t>1/27/13</a:t>
+              <a:t>10/9/2026</a:t>
             </a:fld>
             <a:endParaRPr lang="en-US"/>
           </a:p>
@@ -3084,7 +3079,7 @@
 </file>
 
 <file path=ppt/slides/slide1.xml><?xml version="1.0" encoding="utf-8"?>
-<p:sld xmlns:a="http://schemas.openxmlformats.org/drawingml/2006/main" xmlns:p="http://schemas.openxmlformats.org/presentationml/2006/main" xmlns:r="http://schemas.openxmlformats.org/officeDocument/2006/relationships">
+<p:sld xmlns:a="http://schemas.openxmlformats.org/drawingml/2006/main" xmlns:r="http://schemas.openxmlformats.org/officeDocument/2006/relationships" xmlns:p="http://schemas.openxmlformats.org/presentationml/2006/main">
   <p:cSld>
     <p:spTree>
       <p:nvGrpSpPr>
@@ -3092,7 +3087,14 @@
         <p:cNvGrpSpPr/>
         <p:nvPr/>
       </p:nvGrpSpPr>
-      <p:grpSpPr/>
+      <p:grpSpPr>
+        <a:xfrm>
+          <a:off x="0" y="0"/>
+          <a:ext cx="0" cy="0"/>
+          <a:chOff x="0" y="0"/>
+          <a:chExt cx="0" cy="0"/>
+        </a:xfrm>
+      </p:grpSpPr>
       <p:sp>
         <p:nvSpPr>
           <p:cNvPr id="2" name="Rectangle 1"/>
@@ -3108,7 +3110,9 @@
             <a:avLst/>
           </a:prstGeom>
           <a:solidFill>
-            <a:srgbClr val="0B2B47"/>
+            <a:schemeClr val="accent6">
+              <a:lumMod val="75000"/>
+            </a:schemeClr>
           </a:solidFill>
           <a:ln>
             <a:noFill/>
@@ -3133,6 +3137,7 @@
           <a:lstStyle/>
           <a:p>
             <a:pPr algn="ctr"/>
+            <a:endParaRPr/>
           </a:p>
         </p:txBody>
       </p:sp>
@@ -3176,6 +3181,7 @@
           <a:lstStyle/>
           <a:p>
             <a:pPr algn="ctr"/>
+            <a:endParaRPr/>
           </a:p>
         </p:txBody>
       </p:sp>
@@ -3266,7 +3272,7 @@
         <p:spPr>
           <a:xfrm>
             <a:off x="4754880" y="1371600"/>
-            <a:ext cx="6583680" cy="2103120"/>
+            <a:ext cx="6583680" cy="1600438"/>
           </a:xfrm>
           <a:prstGeom prst="rect">
             <a:avLst/>
@@ -3287,10 +3293,14 @@
               </a:defRPr>
             </a:pPr>
             <a:r>
+              <a:rPr dirty="0"/>
               <a:t>Building Permit Approval &amp;</a:t>
             </a:r>
-            <a:br/>
-            <a:r>
+            <a:br>
+              <a:rPr dirty="0"/>
+            </a:br>
+            <a:r>
+              <a:rPr dirty="0"/>
               <a:t>Tracking System (BPAMS)</a:t>
             </a:r>
           </a:p>
@@ -3303,6 +3313,14 @@
               </a:defRPr>
             </a:pPr>
             <a:r>
+              <a:rPr dirty="0">
+                <a:solidFill>
+                  <a:schemeClr val="accent6">
+                    <a:lumMod val="20000"/>
+                    <a:lumOff val="80000"/>
+                  </a:schemeClr>
+                </a:solidFill>
+              </a:rPr>
               <a:t>One permit. Many departments. Zero blind spots.</a:t>
             </a:r>
           </a:p>
@@ -3315,6 +3333,7 @@
               </a:defRPr>
             </a:pPr>
             <a:r>
+              <a:rPr dirty="0"/>
               <a:t>A transparent, sequential building-permit workflow with real-time multi-department scrutiny tracking for applicants, officials, and citizens.</a:t>
             </a:r>
           </a:p>
@@ -3362,6 +3381,7 @@
           <a:lstStyle/>
           <a:p>
             <a:pPr algn="ctr"/>
+            <a:endParaRPr/>
           </a:p>
         </p:txBody>
       </p:sp>
@@ -3438,7 +3458,7 @@
           </a:fontRef>
         </p:style>
         <p:txBody>
-          <a:bodyPr rtlCol="0" anchor="ctr" wrap="square" lIns="137160" rIns="137160" tIns="109728"/>
+          <a:bodyPr wrap="square" lIns="137160" tIns="109728" rIns="137160" rtlCol="0" anchor="ctr"/>
           <a:lstStyle/>
           <a:p>
             <a:pPr algn="ctr">
@@ -3516,7 +3536,7 @@
           </a:fontRef>
         </p:style>
         <p:txBody>
-          <a:bodyPr rtlCol="0" anchor="ctr" wrap="square" lIns="137160" rIns="137160" tIns="109728"/>
+          <a:bodyPr wrap="square" lIns="137160" tIns="109728" rIns="137160" rtlCol="0" anchor="ctr"/>
           <a:lstStyle/>
           <a:p>
             <a:pPr algn="ctr">
@@ -3594,7 +3614,7 @@
           </a:fontRef>
         </p:style>
         <p:txBody>
-          <a:bodyPr rtlCol="0" anchor="ctr" wrap="square" lIns="137160" rIns="137160" tIns="109728"/>
+          <a:bodyPr wrap="square" lIns="137160" tIns="109728" rIns="137160" rtlCol="0" anchor="ctr"/>
           <a:lstStyle/>
           <a:p>
             <a:pPr algn="ctr">
@@ -3672,7 +3692,7 @@
           </a:fontRef>
         </p:style>
         <p:txBody>
-          <a:bodyPr rtlCol="0" anchor="ctr" wrap="square" lIns="137160" rIns="137160" tIns="109728"/>
+          <a:bodyPr wrap="square" lIns="137160" tIns="109728" rIns="137160" rtlCol="0" anchor="ctr"/>
           <a:lstStyle/>
           <a:p>
             <a:pPr algn="ctr">
@@ -3721,7 +3741,7 @@
 </file>
 
 <file path=ppt/slides/slide2.xml><?xml version="1.0" encoding="utf-8"?>
-<p:sld xmlns:a="http://schemas.openxmlformats.org/drawingml/2006/main" xmlns:p="http://schemas.openxmlformats.org/presentationml/2006/main" xmlns:r="http://schemas.openxmlformats.org/officeDocument/2006/relationships">
+<p:sld xmlns:a="http://schemas.openxmlformats.org/drawingml/2006/main" xmlns:r="http://schemas.openxmlformats.org/officeDocument/2006/relationships" xmlns:p="http://schemas.openxmlformats.org/presentationml/2006/main">
   <p:cSld>
     <p:spTree>
       <p:nvGrpSpPr>
@@ -3729,7 +3749,14 @@
         <p:cNvGrpSpPr/>
         <p:nvPr/>
       </p:nvGrpSpPr>
-      <p:grpSpPr/>
+      <p:grpSpPr>
+        <a:xfrm>
+          <a:off x="0" y="0"/>
+          <a:ext cx="0" cy="0"/>
+          <a:chOff x="0" y="0"/>
+          <a:chExt cx="0" cy="0"/>
+        </a:xfrm>
+      </p:grpSpPr>
       <p:sp>
         <p:nvSpPr>
           <p:cNvPr id="2" name="Rectangle 1"/>
@@ -3770,6 +3797,7 @@
           <a:lstStyle/>
           <a:p>
             <a:pPr algn="ctr"/>
+            <a:endParaRPr/>
           </a:p>
         </p:txBody>
       </p:sp>
@@ -3813,6 +3841,7 @@
           <a:lstStyle/>
           <a:p>
             <a:pPr algn="ctr"/>
+            <a:endParaRPr/>
           </a:p>
         </p:txBody>
       </p:sp>
@@ -3833,7 +3862,7 @@
           <a:noFill/>
         </p:spPr>
         <p:txBody>
-          <a:bodyPr wrap="square" tIns="0" bIns="0" lIns="0">
+          <a:bodyPr wrap="square" lIns="0" tIns="0" bIns="0">
             <a:spAutoFit/>
           </a:bodyPr>
           <a:lstStyle/>
@@ -3960,7 +3989,7 @@
           </a:fontRef>
         </p:style>
         <p:txBody>
-          <a:bodyPr rtlCol="0" anchor="ctr" wrap="square" lIns="228600" rIns="228600" tIns="228600"/>
+          <a:bodyPr wrap="square" lIns="228600" tIns="228600" rIns="228600" rtlCol="0" anchor="ctr"/>
           <a:lstStyle/>
           <a:p>
             <a:pPr algn="ctr">
@@ -4039,7 +4068,7 @@
           </a:fontRef>
         </p:style>
         <p:txBody>
-          <a:bodyPr rtlCol="0" anchor="ctr" wrap="square" lIns="228600" rIns="228600" tIns="228600"/>
+          <a:bodyPr wrap="square" lIns="228600" tIns="228600" rIns="228600" rtlCol="0" anchor="ctr"/>
           <a:lstStyle/>
           <a:p>
             <a:pPr algn="ctr">
@@ -4118,7 +4147,7 @@
           </a:fontRef>
         </p:style>
         <p:txBody>
-          <a:bodyPr rtlCol="0" anchor="ctr" wrap="square" lIns="228600" rIns="228600" tIns="228600"/>
+          <a:bodyPr wrap="square" lIns="228600" tIns="228600" rIns="228600" rtlCol="0" anchor="ctr"/>
           <a:lstStyle/>
           <a:p>
             <a:pPr algn="ctr">
@@ -4197,7 +4226,7 @@
           </a:fontRef>
         </p:style>
         <p:txBody>
-          <a:bodyPr rtlCol="0" anchor="ctr" wrap="square" lIns="274320" tIns="182880"/>
+          <a:bodyPr wrap="square" lIns="274320" tIns="182880" rtlCol="0" anchor="ctr"/>
           <a:lstStyle/>
           <a:p>
             <a:pPr algn="ctr">
@@ -4234,7 +4263,7 @@
 </file>
 
 <file path=ppt/slides/slide3.xml><?xml version="1.0" encoding="utf-8"?>
-<p:sld xmlns:a="http://schemas.openxmlformats.org/drawingml/2006/main" xmlns:p="http://schemas.openxmlformats.org/presentationml/2006/main" xmlns:r="http://schemas.openxmlformats.org/officeDocument/2006/relationships">
+<p:sld xmlns:a="http://schemas.openxmlformats.org/drawingml/2006/main" xmlns:r="http://schemas.openxmlformats.org/officeDocument/2006/relationships" xmlns:p="http://schemas.openxmlformats.org/presentationml/2006/main">
   <p:cSld>
     <p:spTree>
       <p:nvGrpSpPr>
@@ -4242,7 +4271,14 @@
         <p:cNvGrpSpPr/>
         <p:nvPr/>
       </p:nvGrpSpPr>
-      <p:grpSpPr/>
+      <p:grpSpPr>
+        <a:xfrm>
+          <a:off x="0" y="0"/>
+          <a:ext cx="0" cy="0"/>
+          <a:chOff x="0" y="0"/>
+          <a:chExt cx="0" cy="0"/>
+        </a:xfrm>
+      </p:grpSpPr>
       <p:sp>
         <p:nvSpPr>
           <p:cNvPr id="2" name="Rectangle 1"/>
@@ -4283,6 +4319,7 @@
           <a:lstStyle/>
           <a:p>
             <a:pPr algn="ctr"/>
+            <a:endParaRPr/>
           </a:p>
         </p:txBody>
       </p:sp>
@@ -4326,6 +4363,7 @@
           <a:lstStyle/>
           <a:p>
             <a:pPr algn="ctr"/>
+            <a:endParaRPr/>
           </a:p>
         </p:txBody>
       </p:sp>
@@ -4346,7 +4384,7 @@
           <a:noFill/>
         </p:spPr>
         <p:txBody>
-          <a:bodyPr wrap="square" tIns="0" bIns="0" lIns="0">
+          <a:bodyPr wrap="square" lIns="0" tIns="0" bIns="0">
             <a:spAutoFit/>
           </a:bodyPr>
           <a:lstStyle/>
@@ -4473,7 +4511,7 @@
           </a:fontRef>
         </p:style>
         <p:txBody>
-          <a:bodyPr rtlCol="0" anchor="ctr" wrap="square" lIns="109728" tIns="164592"/>
+          <a:bodyPr wrap="square" lIns="109728" tIns="164592" rtlCol="0" anchor="ctr"/>
           <a:lstStyle/>
           <a:p>
             <a:pPr algn="ctr">
@@ -4582,7 +4620,7 @@
           </a:fontRef>
         </p:style>
         <p:txBody>
-          <a:bodyPr rtlCol="0" anchor="ctr" wrap="square" lIns="109728" tIns="164592"/>
+          <a:bodyPr wrap="square" lIns="109728" tIns="164592" rtlCol="0" anchor="ctr"/>
           <a:lstStyle/>
           <a:p>
             <a:pPr algn="ctr">
@@ -4691,7 +4729,7 @@
           </a:fontRef>
         </p:style>
         <p:txBody>
-          <a:bodyPr rtlCol="0" anchor="ctr" wrap="square" lIns="109728" tIns="164592"/>
+          <a:bodyPr wrap="square" lIns="109728" tIns="164592" rtlCol="0" anchor="ctr"/>
           <a:lstStyle/>
           <a:p>
             <a:pPr algn="ctr">
@@ -4800,7 +4838,7 @@
           </a:fontRef>
         </p:style>
         <p:txBody>
-          <a:bodyPr rtlCol="0" anchor="ctr" wrap="square" lIns="109728" tIns="164592"/>
+          <a:bodyPr wrap="square" lIns="109728" tIns="164592" rtlCol="0" anchor="ctr"/>
           <a:lstStyle/>
           <a:p>
             <a:pPr algn="ctr">
@@ -4909,7 +4947,7 @@
           </a:fontRef>
         </p:style>
         <p:txBody>
-          <a:bodyPr rtlCol="0" anchor="ctr" wrap="square" lIns="109728" tIns="164592"/>
+          <a:bodyPr wrap="square" lIns="109728" tIns="164592" rtlCol="0" anchor="ctr"/>
           <a:lstStyle/>
           <a:p>
             <a:pPr algn="ctr">
@@ -4983,7 +5021,7 @@
           </a:fontRef>
         </p:style>
         <p:txBody>
-          <a:bodyPr rtlCol="0" anchor="ctr" wrap="square" lIns="182880" tIns="137160"/>
+          <a:bodyPr wrap="square" lIns="182880" tIns="137160" rtlCol="0" anchor="ctr"/>
           <a:lstStyle/>
           <a:p>
             <a:pPr algn="ctr">
@@ -5049,7 +5087,7 @@
           </a:fontRef>
         </p:style>
         <p:txBody>
-          <a:bodyPr rtlCol="0" anchor="ctr" wrap="square" lIns="182880" tIns="137160"/>
+          <a:bodyPr wrap="square" lIns="182880" tIns="137160" rtlCol="0" anchor="ctr"/>
           <a:lstStyle/>
           <a:p>
             <a:pPr algn="ctr">
@@ -5115,7 +5153,7 @@
           </a:fontRef>
         </p:style>
         <p:txBody>
-          <a:bodyPr rtlCol="0" anchor="ctr" wrap="square" lIns="182880" tIns="137160"/>
+          <a:bodyPr wrap="square" lIns="182880" tIns="137160" rtlCol="0" anchor="ctr"/>
           <a:lstStyle/>
           <a:p>
             <a:pPr algn="ctr">
@@ -5181,7 +5219,7 @@
           </a:fontRef>
         </p:style>
         <p:txBody>
-          <a:bodyPr rtlCol="0" anchor="ctr" lIns="228600" tIns="137160"/>
+          <a:bodyPr lIns="228600" tIns="137160" rtlCol="0" anchor="ctr"/>
           <a:lstStyle/>
           <a:p>
             <a:pPr algn="ctr">
@@ -5218,7 +5256,7 @@
 </file>
 
 <file path=ppt/slides/slide4.xml><?xml version="1.0" encoding="utf-8"?>
-<p:sld xmlns:a="http://schemas.openxmlformats.org/drawingml/2006/main" xmlns:p="http://schemas.openxmlformats.org/presentationml/2006/main" xmlns:r="http://schemas.openxmlformats.org/officeDocument/2006/relationships">
+<p:sld xmlns:a="http://schemas.openxmlformats.org/drawingml/2006/main" xmlns:r="http://schemas.openxmlformats.org/officeDocument/2006/relationships" xmlns:p="http://schemas.openxmlformats.org/presentationml/2006/main">
   <p:cSld>
     <p:spTree>
       <p:nvGrpSpPr>
@@ -5226,7 +5264,14 @@
         <p:cNvGrpSpPr/>
         <p:nvPr/>
       </p:nvGrpSpPr>
-      <p:grpSpPr/>
+      <p:grpSpPr>
+        <a:xfrm>
+          <a:off x="0" y="0"/>
+          <a:ext cx="0" cy="0"/>
+          <a:chOff x="0" y="0"/>
+          <a:chExt cx="0" cy="0"/>
+        </a:xfrm>
+      </p:grpSpPr>
       <p:sp>
         <p:nvSpPr>
           <p:cNvPr id="2" name="Rectangle 1"/>
@@ -5267,6 +5312,7 @@
           <a:lstStyle/>
           <a:p>
             <a:pPr algn="ctr"/>
+            <a:endParaRPr/>
           </a:p>
         </p:txBody>
       </p:sp>
@@ -5310,6 +5356,7 @@
           <a:lstStyle/>
           <a:p>
             <a:pPr algn="ctr"/>
+            <a:endParaRPr/>
           </a:p>
         </p:txBody>
       </p:sp>
@@ -5330,7 +5377,7 @@
           <a:noFill/>
         </p:spPr>
         <p:txBody>
-          <a:bodyPr wrap="square" tIns="0" bIns="0" lIns="0">
+          <a:bodyPr wrap="square" lIns="0" tIns="0" bIns="0">
             <a:spAutoFit/>
           </a:bodyPr>
           <a:lstStyle/>
@@ -5457,7 +5504,7 @@
           </a:fontRef>
         </p:style>
         <p:txBody>
-          <a:bodyPr rtlCol="0" anchor="ctr" wrap="square" lIns="182880" tIns="109728"/>
+          <a:bodyPr wrap="square" lIns="182880" tIns="109728" rtlCol="0" anchor="ctr"/>
           <a:lstStyle/>
           <a:p>
             <a:pPr algn="ctr">
@@ -5523,7 +5570,7 @@
           </a:fontRef>
         </p:style>
         <p:txBody>
-          <a:bodyPr rtlCol="0" anchor="ctr" wrap="square" lIns="182880" tIns="109728"/>
+          <a:bodyPr wrap="square" lIns="182880" tIns="109728" rtlCol="0" anchor="ctr"/>
           <a:lstStyle/>
           <a:p>
             <a:pPr algn="ctr">
@@ -5589,7 +5636,7 @@
           </a:fontRef>
         </p:style>
         <p:txBody>
-          <a:bodyPr rtlCol="0" anchor="ctr" wrap="square" lIns="182880" tIns="109728"/>
+          <a:bodyPr wrap="square" lIns="182880" tIns="109728" rtlCol="0" anchor="ctr"/>
           <a:lstStyle/>
           <a:p>
             <a:pPr algn="ctr">
@@ -5655,7 +5702,7 @@
           </a:fontRef>
         </p:style>
         <p:txBody>
-          <a:bodyPr rtlCol="0" anchor="ctr" wrap="square" lIns="182880" tIns="109728"/>
+          <a:bodyPr wrap="square" lIns="182880" tIns="109728" rtlCol="0" anchor="ctr"/>
           <a:lstStyle/>
           <a:p>
             <a:pPr algn="ctr">
@@ -5721,7 +5768,7 @@
           </a:fontRef>
         </p:style>
         <p:txBody>
-          <a:bodyPr rtlCol="0" anchor="ctr" wrap="square" lIns="182880" tIns="91440"/>
+          <a:bodyPr wrap="square" lIns="182880" tIns="91440" rtlCol="0" anchor="ctr"/>
           <a:lstStyle/>
           <a:p>
             <a:pPr algn="ctr">
@@ -5787,7 +5834,7 @@
           </a:fontRef>
         </p:style>
         <p:txBody>
-          <a:bodyPr rtlCol="0" anchor="ctr" wrap="square" lIns="182880" tIns="91440"/>
+          <a:bodyPr wrap="square" lIns="182880" tIns="91440" rtlCol="0" anchor="ctr"/>
           <a:lstStyle/>
           <a:p>
             <a:pPr algn="ctr">
@@ -5853,7 +5900,7 @@
           </a:fontRef>
         </p:style>
         <p:txBody>
-          <a:bodyPr rtlCol="0" anchor="ctr" wrap="square" lIns="182880" tIns="91440"/>
+          <a:bodyPr wrap="square" lIns="182880" tIns="91440" rtlCol="0" anchor="ctr"/>
           <a:lstStyle/>
           <a:p>
             <a:pPr algn="ctr">
@@ -5919,7 +5966,7 @@
           </a:fontRef>
         </p:style>
         <p:txBody>
-          <a:bodyPr rtlCol="0" anchor="ctr" wrap="square" lIns="182880" tIns="91440"/>
+          <a:bodyPr wrap="square" lIns="182880" tIns="91440" rtlCol="0" anchor="ctr"/>
           <a:lstStyle/>
           <a:p>
             <a:pPr algn="ctr">
@@ -5956,7 +6003,7 @@
 </file>
 
 <file path=ppt/slides/slide5.xml><?xml version="1.0" encoding="utf-8"?>
-<p:sld xmlns:a="http://schemas.openxmlformats.org/drawingml/2006/main" xmlns:p="http://schemas.openxmlformats.org/presentationml/2006/main" xmlns:r="http://schemas.openxmlformats.org/officeDocument/2006/relationships">
+<p:sld xmlns:a="http://schemas.openxmlformats.org/drawingml/2006/main" xmlns:r="http://schemas.openxmlformats.org/officeDocument/2006/relationships" xmlns:p="http://schemas.openxmlformats.org/presentationml/2006/main">
   <p:cSld>
     <p:spTree>
       <p:nvGrpSpPr>
@@ -5964,7 +6011,14 @@
         <p:cNvGrpSpPr/>
         <p:nvPr/>
       </p:nvGrpSpPr>
-      <p:grpSpPr/>
+      <p:grpSpPr>
+        <a:xfrm>
+          <a:off x="0" y="0"/>
+          <a:ext cx="0" cy="0"/>
+          <a:chOff x="0" y="0"/>
+          <a:chExt cx="0" cy="0"/>
+        </a:xfrm>
+      </p:grpSpPr>
       <p:sp>
         <p:nvSpPr>
           <p:cNvPr id="2" name="Rectangle 1"/>
@@ -6005,6 +6059,7 @@
           <a:lstStyle/>
           <a:p>
             <a:pPr algn="ctr"/>
+            <a:endParaRPr/>
           </a:p>
         </p:txBody>
       </p:sp>
@@ -6048,6 +6103,7 @@
           <a:lstStyle/>
           <a:p>
             <a:pPr algn="ctr"/>
+            <a:endParaRPr/>
           </a:p>
         </p:txBody>
       </p:sp>
@@ -6068,7 +6124,7 @@
           <a:noFill/>
         </p:spPr>
         <p:txBody>
-          <a:bodyPr wrap="square" tIns="0" bIns="0" lIns="0">
+          <a:bodyPr wrap="square" lIns="0" tIns="0" bIns="0">
             <a:spAutoFit/>
           </a:bodyPr>
           <a:lstStyle/>
@@ -6199,6 +6255,7 @@
           <a:lstStyle/>
           <a:p>
             <a:pPr algn="ctr"/>
+            <a:endParaRPr/>
           </a:p>
         </p:txBody>
       </p:sp>
@@ -6271,7 +6328,7 @@
           <a:noFill/>
         </p:spPr>
         <p:txBody>
-          <a:bodyPr wrap="square" tIns="0" lIns="0">
+          <a:bodyPr wrap="square" lIns="0" tIns="0">
             <a:spAutoFit/>
           </a:bodyPr>
           <a:lstStyle/>
@@ -6394,6 +6451,7 @@
           <a:lstStyle/>
           <a:p>
             <a:pPr algn="ctr"/>
+            <a:endParaRPr/>
           </a:p>
         </p:txBody>
       </p:sp>
@@ -6466,7 +6524,7 @@
           <a:noFill/>
         </p:spPr>
         <p:txBody>
-          <a:bodyPr wrap="square" tIns="0" lIns="0">
+          <a:bodyPr wrap="square" lIns="0" tIns="0">
             <a:spAutoFit/>
           </a:bodyPr>
           <a:lstStyle/>
@@ -6589,6 +6647,7 @@
           <a:lstStyle/>
           <a:p>
             <a:pPr algn="ctr"/>
+            <a:endParaRPr/>
           </a:p>
         </p:txBody>
       </p:sp>
@@ -6661,7 +6720,7 @@
           <a:noFill/>
         </p:spPr>
         <p:txBody>
-          <a:bodyPr wrap="square" tIns="0" lIns="0">
+          <a:bodyPr wrap="square" lIns="0" tIns="0">
             <a:spAutoFit/>
           </a:bodyPr>
           <a:lstStyle/>
@@ -6780,7 +6839,7 @@
           </a:fontRef>
         </p:style>
         <p:txBody>
-          <a:bodyPr rtlCol="0" anchor="ctr" lIns="228600" tIns="137160"/>
+          <a:bodyPr lIns="228600" tIns="137160" rtlCol="0" anchor="ctr"/>
           <a:lstStyle/>
           <a:p>
             <a:pPr algn="ctr">
@@ -6817,7 +6876,7 @@
 </file>
 
 <file path=ppt/slides/slide6.xml><?xml version="1.0" encoding="utf-8"?>
-<p:sld xmlns:a="http://schemas.openxmlformats.org/drawingml/2006/main" xmlns:p="http://schemas.openxmlformats.org/presentationml/2006/main" xmlns:r="http://schemas.openxmlformats.org/officeDocument/2006/relationships">
+<p:sld xmlns:a="http://schemas.openxmlformats.org/drawingml/2006/main" xmlns:r="http://schemas.openxmlformats.org/officeDocument/2006/relationships" xmlns:p="http://schemas.openxmlformats.org/presentationml/2006/main">
   <p:cSld>
     <p:spTree>
       <p:nvGrpSpPr>
@@ -6825,7 +6884,14 @@
         <p:cNvGrpSpPr/>
         <p:nvPr/>
       </p:nvGrpSpPr>
-      <p:grpSpPr/>
+      <p:grpSpPr>
+        <a:xfrm>
+          <a:off x="0" y="0"/>
+          <a:ext cx="0" cy="0"/>
+          <a:chOff x="0" y="0"/>
+          <a:chExt cx="0" cy="0"/>
+        </a:xfrm>
+      </p:grpSpPr>
       <p:sp>
         <p:nvSpPr>
           <p:cNvPr id="2" name="Rectangle 1"/>
@@ -6866,6 +6932,7 @@
           <a:lstStyle/>
           <a:p>
             <a:pPr algn="ctr"/>
+            <a:endParaRPr/>
           </a:p>
         </p:txBody>
       </p:sp>
@@ -6909,6 +6976,7 @@
           <a:lstStyle/>
           <a:p>
             <a:pPr algn="ctr"/>
+            <a:endParaRPr/>
           </a:p>
         </p:txBody>
       </p:sp>
@@ -6929,7 +6997,7 @@
           <a:noFill/>
         </p:spPr>
         <p:txBody>
-          <a:bodyPr wrap="square" tIns="0" bIns="0" lIns="0">
+          <a:bodyPr wrap="square" lIns="0" tIns="0" bIns="0">
             <a:spAutoFit/>
           </a:bodyPr>
           <a:lstStyle/>
@@ -7091,7 +7159,7 @@
           </a:fontRef>
         </p:style>
         <p:txBody>
-          <a:bodyPr rtlCol="0" anchor="ctr" wrap="square" lIns="137160" tIns="109728"/>
+          <a:bodyPr wrap="square" lIns="137160" tIns="109728" rtlCol="0" anchor="ctr"/>
           <a:lstStyle/>
           <a:p>
             <a:pPr algn="ctr">
@@ -7169,7 +7237,7 @@
           </a:fontRef>
         </p:style>
         <p:txBody>
-          <a:bodyPr rtlCol="0" anchor="ctr" wrap="square" lIns="137160" tIns="109728"/>
+          <a:bodyPr wrap="square" lIns="137160" tIns="109728" rtlCol="0" anchor="ctr"/>
           <a:lstStyle/>
           <a:p>
             <a:pPr algn="ctr">
@@ -7247,7 +7315,7 @@
           </a:fontRef>
         </p:style>
         <p:txBody>
-          <a:bodyPr rtlCol="0" anchor="ctr" wrap="square" lIns="137160" tIns="109728"/>
+          <a:bodyPr wrap="square" lIns="137160" tIns="109728" rtlCol="0" anchor="ctr"/>
           <a:lstStyle/>
           <a:p>
             <a:pPr algn="ctr">
@@ -7325,7 +7393,7 @@
           </a:fontRef>
         </p:style>
         <p:txBody>
-          <a:bodyPr rtlCol="0" anchor="ctr" wrap="square" lIns="137160" tIns="109728"/>
+          <a:bodyPr wrap="square" lIns="137160" tIns="109728" rtlCol="0" anchor="ctr"/>
           <a:lstStyle/>
           <a:p>
             <a:pPr algn="ctr">
@@ -7438,7 +7506,7 @@
           </a:fontRef>
         </p:style>
         <p:txBody>
-          <a:bodyPr rtlCol="0" anchor="ctr" wrap="square" lIns="182880" tIns="91440"/>
+          <a:bodyPr wrap="square" lIns="182880" tIns="91440" rtlCol="0" anchor="ctr"/>
           <a:lstStyle/>
           <a:p>
             <a:pPr algn="ctr">
@@ -7516,7 +7584,7 @@
           </a:fontRef>
         </p:style>
         <p:txBody>
-          <a:bodyPr rtlCol="0" anchor="ctr" wrap="square" lIns="182880" tIns="91440"/>
+          <a:bodyPr wrap="square" lIns="182880" tIns="91440" rtlCol="0" anchor="ctr"/>
           <a:lstStyle/>
           <a:p>
             <a:pPr algn="ctr">
@@ -7590,7 +7658,7 @@
           </a:fontRef>
         </p:style>
         <p:txBody>
-          <a:bodyPr rtlCol="0" anchor="ctr" wrap="square" lIns="182880" tIns="91440"/>
+          <a:bodyPr wrap="square" lIns="182880" tIns="91440" rtlCol="0" anchor="ctr"/>
           <a:lstStyle/>
           <a:p>
             <a:pPr algn="ctr">
@@ -7664,7 +7732,7 @@
           </a:fontRef>
         </p:style>
         <p:txBody>
-          <a:bodyPr rtlCol="0" anchor="ctr" lIns="228600" tIns="164592"/>
+          <a:bodyPr lIns="228600" tIns="164592" rtlCol="0" anchor="ctr"/>
           <a:lstStyle/>
           <a:p>
             <a:pPr algn="ctr">

--- a/LinkUp_Presentation.pptx
+++ b/LinkUp_Presentation.pptx
@@ -3110,9 +3110,7 @@
             <a:avLst/>
           </a:prstGeom>
           <a:solidFill>
-            <a:schemeClr val="accent6">
-              <a:lumMod val="75000"/>
-            </a:schemeClr>
+            <a:srgbClr val="0B2B47"/>
           </a:solidFill>
           <a:ln>
             <a:noFill/>
@@ -3234,6 +3232,7 @@
               </a:defRPr>
             </a:pPr>
             <a:r>
+              <a:rPr dirty="0"/>
               <a:t>🏛️ PROBLEM STATEMENT: GOV TECH PS1   |   👥 TEAM: THE PARADIGM   |   DIGITAL GOVERNANCE</a:t>
             </a:r>
           </a:p>
@@ -3272,7 +3271,7 @@
         <p:spPr>
           <a:xfrm>
             <a:off x="4754880" y="1371600"/>
-            <a:ext cx="6583680" cy="1600438"/>
+            <a:ext cx="6583680" cy="2103120"/>
           </a:xfrm>
           <a:prstGeom prst="rect">
             <a:avLst/>
@@ -3313,14 +3312,7 @@
               </a:defRPr>
             </a:pPr>
             <a:r>
-              <a:rPr dirty="0">
-                <a:solidFill>
-                  <a:schemeClr val="accent6">
-                    <a:lumMod val="20000"/>
-                    <a:lumOff val="80000"/>
-                  </a:schemeClr>
-                </a:solidFill>
-              </a:rPr>
+              <a:rPr dirty="0"/>
               <a:t>One permit. Many departments. Zero blind spots.</a:t>
             </a:r>
           </a:p>
@@ -3415,6 +3407,7 @@
               </a:defRPr>
             </a:pPr>
             <a:r>
+              <a:rPr dirty="0"/>
               <a:t>UPDATED ENTERPRISE TECH STACK &amp; SYSTEM ARCHITECTURE</a:t>
             </a:r>
           </a:p>
